--- a/PPT+Report/WLMS_DevOps.pptx
+++ b/PPT+Report/WLMS_DevOps.pptx
@@ -4,6 +4,9 @@
   <p:sldMasterIdLst>
     <p:sldMasterId id="2147483648" r:id="rId1"/>
   </p:sldMasterIdLst>
+  <p:notesMasterIdLst>
+    <p:notesMasterId r:id="rId7"/>
+  </p:notesMasterIdLst>
   <p:sldIdLst>
     <p:sldId id="256" r:id="rId2"/>
     <p:sldId id="257" r:id="rId3"/>
@@ -11,10 +14,7 @@
     <p:sldId id="259" r:id="rId5"/>
     <p:sldId id="260" r:id="rId6"/>
   </p:sldIdLst>
-  <p:notesMasterIdLst>
-    <p:notesMasterId r:id="rId7"/>
-  </p:notesMasterIdLst>
-  <p:sldSz cx="9144000" cy="5143500"/>
+  <p:sldSz cx="9144000" cy="5143500" type="screen16x9"/>
   <p:notesSz cx="5143500" cy="9144000"/>
   <p:defaultTextStyle>
     <a:lvl1pPr marL="0" algn="l" defTabSz="914400" rtl="0" eaLnBrk="1" latinLnBrk="0" hangingPunct="1">
@@ -108,6 +108,11 @@
       </a:defRPr>
     </a:lvl9pPr>
   </p:defaultTextStyle>
+  <p:extLst>
+    <p:ext uri="{EFAFB233-063F-42B5-8137-9DF3F51BA10A}">
+      <p15:sldGuideLst xmlns:p15="http://schemas.microsoft.com/office/powerpoint/2012/main"/>
+    </p:ext>
+  </p:extLst>
 </p:presentation>
 </file>
 
@@ -133,234 +138,10 @@
           <a:chExt cx="0" cy="0"/>
         </a:xfrm>
       </p:grpSpPr>
-      <p:sp>
-        <p:nvSpPr>
-          <p:cNvPr id="2" name="Header Placeholder 1"/>
-          <p:cNvSpPr>
-            <a:spLocks noGrp="1"/>
-          </p:cNvSpPr>
-          <p:nvPr>
-            <p:ph type="hdr" sz="quarter"/>
-          </p:nvPr>
-        </p:nvSpPr>
-        <p:spPr>
-          <a:xfrm>
-            <a:off x="0" y="0"/>
-            <a:ext cx="2971800" cy="458788"/>
-          </a:xfrm>
-          <a:prstGeom prst="rect">
-            <a:avLst/>
-          </a:prstGeom>
-        </p:spPr>
-        <p:txBody>
-          <a:bodyPr vert="horz" lIns="91440" tIns="45720" rIns="91440" bIns="45720" rtlCol="0"/>
-          <a:lstStyle>
-            <a:lvl1pPr algn="l">
-              <a:defRPr sz="1200"/>
-            </a:lvl1pPr>
-          </a:lstStyle>
-          <a:p>
-            <a:endParaRPr lang="en-US"/>
-          </a:p>
-        </p:txBody>
-      </p:sp>
-      <p:sp>
-        <p:nvSpPr>
-          <p:cNvPr id="3" name="Date Placeholder 2"/>
-          <p:cNvSpPr>
-            <a:spLocks noGrp="1"/>
-          </p:cNvSpPr>
-          <p:nvPr>
-            <p:ph type="dt" idx="1"/>
-          </p:nvPr>
-        </p:nvSpPr>
-        <p:spPr>
-          <a:xfrm>
-            <a:off x="3884613" y="0"/>
-            <a:ext cx="2971800" cy="458788"/>
-          </a:xfrm>
-          <a:prstGeom prst="rect">
-            <a:avLst/>
-          </a:prstGeom>
-        </p:spPr>
-        <p:txBody>
-          <a:bodyPr vert="horz" lIns="91440" tIns="45720" rIns="91440" bIns="45720" rtlCol="0"/>
-          <a:lstStyle>
-            <a:lvl1pPr algn="r">
-              <a:defRPr sz="1200"/>
-            </a:lvl1pPr>
-          </a:lstStyle>
-          <a:p>
-            <a:fld id="{5282F153-3F37-0F45-9E97-73ACFA13230C}" type="datetimeFigureOut">
-              <a:rPr lang="en-US"/>
-              <a:t>7/23/19</a:t>
-            </a:fld>
-            <a:endParaRPr lang="en-US"/>
-          </a:p>
-        </p:txBody>
-      </p:sp>
-      <p:sp>
-        <p:nvSpPr>
-          <p:cNvPr id="4" name="Slide Image Placeholder 3"/>
-          <p:cNvSpPr>
-            <a:spLocks noGrp="1" noRot="1" noChangeAspect="1"/>
-          </p:cNvSpPr>
-          <p:nvPr>
-            <p:ph type="sldImg" idx="2"/>
-          </p:nvPr>
-        </p:nvSpPr>
-        <p:spPr>
-          <a:xfrm>
-            <a:off x="685800" y="1143000"/>
-            <a:ext cx="5486400" cy="3086100"/>
-          </a:xfrm>
-          <a:prstGeom prst="rect">
-            <a:avLst/>
-          </a:prstGeom>
-          <a:noFill/>
-          <a:ln w="12700">
-            <a:solidFill>
-              <a:prstClr val="black"/>
-            </a:solidFill>
-          </a:ln>
-        </p:spPr>
-        <p:txBody>
-          <a:bodyPr vert="horz" lIns="91440" tIns="45720" rIns="91440" bIns="45720" rtlCol="0" anchor="ctr"/>
-          <a:lstStyle/>
-          <a:p>
-            <a:endParaRPr lang="en-US"/>
-          </a:p>
-        </p:txBody>
-      </p:sp>
-      <p:sp>
-        <p:nvSpPr>
-          <p:cNvPr id="5" name="Notes Placeholder 4"/>
-          <p:cNvSpPr>
-            <a:spLocks noGrp="1"/>
-          </p:cNvSpPr>
-          <p:nvPr>
-            <p:ph type="body" sz="quarter" idx="3"/>
-          </p:nvPr>
-        </p:nvSpPr>
-        <p:spPr>
-          <a:xfrm>
-            <a:off x="685800" y="4400550"/>
-            <a:ext cx="5486400" cy="3600450"/>
-          </a:xfrm>
-          <a:prstGeom prst="rect">
-            <a:avLst/>
-          </a:prstGeom>
-        </p:spPr>
-        <p:txBody>
-          <a:bodyPr vert="horz" lIns="91440" tIns="45720" rIns="91440" bIns="45720" rtlCol="0"/>
-          <a:lstStyle/>
-          <a:p>
-            <a:pPr lvl="0"/>
-            <a:r>
-              <a:rPr lang="en-US"/>
-              <a:t>Click to edit Master text styles</a:t>
-            </a:r>
-          </a:p>
-          <a:p>
-            <a:pPr lvl="1"/>
-            <a:r>
-              <a:rPr lang="en-US"/>
-              <a:t>Second level</a:t>
-            </a:r>
-          </a:p>
-          <a:p>
-            <a:pPr lvl="2"/>
-            <a:r>
-              <a:rPr lang="en-US"/>
-              <a:t>Third level</a:t>
-            </a:r>
-          </a:p>
-          <a:p>
-            <a:pPr lvl="3"/>
-            <a:r>
-              <a:rPr lang="en-US"/>
-              <a:t>Fourth level</a:t>
-            </a:r>
-          </a:p>
-          <a:p>
-            <a:pPr lvl="4"/>
-            <a:r>
-              <a:rPr lang="en-US"/>
-              <a:t>Fifth level</a:t>
-            </a:r>
-          </a:p>
-        </p:txBody>
-      </p:sp>
-      <p:sp>
-        <p:nvSpPr>
-          <p:cNvPr id="6" name="Footer Placeholder 5"/>
-          <p:cNvSpPr>
-            <a:spLocks noGrp="1"/>
-          </p:cNvSpPr>
-          <p:nvPr>
-            <p:ph type="ftr" sz="quarter" idx="4"/>
-          </p:nvPr>
-        </p:nvSpPr>
-        <p:spPr>
-          <a:xfrm>
-            <a:off x="0" y="8685213"/>
-            <a:ext cx="2971800" cy="458787"/>
-          </a:xfrm>
-          <a:prstGeom prst="rect">
-            <a:avLst/>
-          </a:prstGeom>
-        </p:spPr>
-        <p:txBody>
-          <a:bodyPr vert="horz" lIns="91440" tIns="45720" rIns="91440" bIns="45720" rtlCol="0" anchor="b"/>
-          <a:lstStyle>
-            <a:lvl1pPr algn="l">
-              <a:defRPr sz="1200"/>
-            </a:lvl1pPr>
-          </a:lstStyle>
-          <a:p>
-            <a:endParaRPr lang="en-US"/>
-          </a:p>
-        </p:txBody>
-      </p:sp>
-      <p:sp>
-        <p:nvSpPr>
-          <p:cNvPr id="7" name="Slide Number Placeholder 6"/>
-          <p:cNvSpPr>
-            <a:spLocks noGrp="1"/>
-          </p:cNvSpPr>
-          <p:nvPr>
-            <p:ph type="sldNum" sz="quarter" idx="5"/>
-          </p:nvPr>
-        </p:nvSpPr>
-        <p:spPr>
-          <a:xfrm>
-            <a:off x="3884613" y="8685213"/>
-            <a:ext cx="2971800" cy="458787"/>
-          </a:xfrm>
-          <a:prstGeom prst="rect">
-            <a:avLst/>
-          </a:prstGeom>
-        </p:spPr>
-        <p:txBody>
-          <a:bodyPr vert="horz" lIns="91440" tIns="45720" rIns="91440" bIns="45720" rtlCol="0" anchor="b"/>
-          <a:lstStyle>
-            <a:lvl1pPr algn="r">
-              <a:defRPr sz="1200"/>
-            </a:lvl1pPr>
-          </a:lstStyle>
-          <a:p>
-            <a:fld id="{CE5E9CC1-C706-0F49-92D6-E571CC5EEA8F}" type="slidenum">
-              <a:rPr lang="en-US"/>
-              <a:t>‹#›</a:t>
-            </a:fld>
-            <a:endParaRPr lang="en-US"/>
-          </a:p>
-        </p:txBody>
-      </p:sp>
     </p:spTree>
     <p:extLst>
       <p:ext uri="{BB962C8B-B14F-4D97-AF65-F5344CB8AC3E}">
-        <p14:creationId xmlns:p14="http://schemas.microsoft.com/office/powerpoint/2010/main" val="1024086991"/>
+        <p14:creationId xmlns:p14="http://schemas.microsoft.com/office/powerpoint/2010/main" val="2315289178"/>
       </p:ext>
     </p:extLst>
   </p:cSld>
@@ -508,7 +289,6 @@
               <a:rPr lang="en-US" dirty="0"/>
               <a:t>Introduce WLMS: Django + React logistics platform with role-based access, wrapped in a full DevOps toolchain. Stats: 4 pipeline stages (Django check, Vite build, Ansible syntax, Docker build/push), 3 K8s manifests, maxUnavailable 0 for rollouts, Prometheus + Grafana + Node Exporter.</a:t>
             </a:r>
-            <a:endParaRPr lang="en-US" dirty="0"/>
           </a:p>
         </p:txBody>
       </p:sp>
@@ -596,7 +376,6 @@
               <a:rPr lang="en-US" dirty="0"/>
               <a:t>Three application tiers run as Kubernetes workloads. Users reach the React/Nginx frontend through a NodePort; the backend is internal (ClusterIP); PostgreSQL uses a persistent volume claim. Five DevOps tools surround it.</a:t>
             </a:r>
-            <a:endParaRPr lang="en-US" dirty="0"/>
           </a:p>
         </p:txBody>
       </p:sp>
@@ -684,7 +463,6 @@
               <a:rPr lang="en-US" dirty="0"/>
               <a:t>Walk left to right through the GitHub Actions workflow. Then show the Kubernetes rolling update: new pod must be ready before an old one is removed, and rollout undo returns to the previous revision.</a:t>
             </a:r>
-            <a:endParaRPr lang="en-US" dirty="0"/>
           </a:p>
         </p:txBody>
       </p:sp>
@@ -772,7 +550,6 @@
               <a:rPr lang="en-US" dirty="0"/>
               <a:t>Be candid: two challenges were solved in the project; four are known gaps that form the improvement roadmap.</a:t>
             </a:r>
-            <a:endParaRPr lang="en-US" dirty="0"/>
           </a:p>
         </p:txBody>
       </p:sp>
@@ -860,7 +637,6 @@
               <a:rPr lang="en-US" dirty="0"/>
               <a:t>Close with the four lessons and the roadmap.</a:t>
             </a:r>
-            <a:endParaRPr lang="en-US" dirty="0"/>
           </a:p>
         </p:txBody>
       </p:sp>
@@ -933,6 +709,11 @@
 <file path=ppt/slideMasters/slideMaster1.xml><?xml version="1.0" encoding="utf-8"?>
 <p:sldMaster xmlns:a="http://schemas.openxmlformats.org/drawingml/2006/main" xmlns:r="http://schemas.openxmlformats.org/officeDocument/2006/relationships" xmlns:p="http://schemas.openxmlformats.org/presentationml/2006/main">
   <p:cSld>
+    <p:bg>
+      <p:bgRef idx="1001">
+        <a:schemeClr val="bg1"/>
+      </p:bgRef>
+    </p:bg>
     <p:spTree>
       <p:nvGrpSpPr>
         <p:cNvPr id="1" name=""/>
@@ -1215,6 +996,7 @@
         <a:solidFill>
           <a:srgbClr val="0B1F2A"/>
         </a:solidFill>
+        <a:effectLst/>
       </p:bgPr>
     </p:bg>
     <p:spTree>
@@ -1252,7 +1034,7 @@
           <a:bodyPr wrap="square" lIns="0" tIns="0" rIns="0" bIns="0" rtlCol="0" anchor="ctr"/>
           <a:lstStyle/>
           <a:p>
-            <a:pPr indent="0" marL="0">
+            <a:pPr marL="0" indent="0">
               <a:buNone/>
             </a:pPr>
             <a:r>
@@ -1276,7 +1058,7 @@
         <p:spPr>
           <a:xfrm>
             <a:off x="548640" y="1051560"/>
-            <a:ext cx="8046720" cy="1371600"/>
+            <a:ext cx="5094514" cy="1371600"/>
           </a:xfrm>
           <a:prstGeom prst="rect">
             <a:avLst/>
@@ -1288,7 +1070,7 @@
           <a:bodyPr wrap="square" lIns="0" tIns="0" rIns="0" bIns="0" rtlCol="0" anchor="t"/>
           <a:lstStyle/>
           <a:p>
-            <a:pPr indent="0" marL="0">
+            <a:pPr marL="0" indent="0">
               <a:buNone/>
             </a:pPr>
             <a:r>
@@ -1305,7 +1087,7 @@
             <a:endParaRPr lang="en-US" sz="4000" dirty="0"/>
           </a:p>
           <a:p>
-            <a:pPr indent="0" marL="0">
+            <a:pPr marL="0" indent="0">
               <a:buNone/>
             </a:pPr>
             <a:r>
@@ -1344,7 +1126,7 @@
           <a:bodyPr wrap="square" lIns="0" tIns="0" rIns="0" bIns="0" rtlCol="0" anchor="ctr"/>
           <a:lstStyle/>
           <a:p>
-            <a:pPr indent="0" marL="0">
+            <a:pPr marL="0" indent="0">
               <a:buNone/>
             </a:pPr>
             <a:r>
@@ -1407,7 +1189,7 @@
           <a:bodyPr wrap="square" lIns="0" tIns="0" rIns="0" bIns="0" rtlCol="0" anchor="ctr"/>
           <a:lstStyle/>
           <a:p>
-            <a:pPr indent="0" marL="0">
+            <a:pPr marL="0" indent="0">
               <a:buNone/>
             </a:pPr>
             <a:r>
@@ -1446,7 +1228,7 @@
           <a:bodyPr wrap="square" lIns="0" tIns="0" rIns="0" bIns="0" rtlCol="0" anchor="t"/>
           <a:lstStyle/>
           <a:p>
-            <a:pPr indent="0" marL="0">
+            <a:pPr marL="0" indent="0">
               <a:buNone/>
             </a:pPr>
             <a:r>
@@ -1509,7 +1291,7 @@
           <a:bodyPr wrap="square" lIns="0" tIns="0" rIns="0" bIns="0" rtlCol="0" anchor="ctr"/>
           <a:lstStyle/>
           <a:p>
-            <a:pPr indent="0" marL="0">
+            <a:pPr marL="0" indent="0">
               <a:buNone/>
             </a:pPr>
             <a:r>
@@ -1548,7 +1330,7 @@
           <a:bodyPr wrap="square" lIns="0" tIns="0" rIns="0" bIns="0" rtlCol="0" anchor="t"/>
           <a:lstStyle/>
           <a:p>
-            <a:pPr indent="0" marL="0">
+            <a:pPr marL="0" indent="0">
               <a:buNone/>
             </a:pPr>
             <a:r>
@@ -1611,7 +1393,7 @@
           <a:bodyPr wrap="square" lIns="0" tIns="0" rIns="0" bIns="0" rtlCol="0" anchor="ctr"/>
           <a:lstStyle/>
           <a:p>
-            <a:pPr indent="0" marL="0">
+            <a:pPr marL="0" indent="0">
               <a:buNone/>
             </a:pPr>
             <a:r>
@@ -1650,7 +1432,7 @@
           <a:bodyPr wrap="square" lIns="0" tIns="0" rIns="0" bIns="0" rtlCol="0" anchor="t"/>
           <a:lstStyle/>
           <a:p>
-            <a:pPr indent="0" marL="0">
+            <a:pPr marL="0" indent="0">
               <a:buNone/>
             </a:pPr>
             <a:r>
@@ -1713,7 +1495,7 @@
           <a:bodyPr wrap="square" lIns="0" tIns="0" rIns="0" bIns="0" rtlCol="0" anchor="ctr"/>
           <a:lstStyle/>
           <a:p>
-            <a:pPr indent="0" marL="0">
+            <a:pPr marL="0" indent="0">
               <a:buNone/>
             </a:pPr>
             <a:r>
@@ -1752,7 +1534,7 @@
           <a:bodyPr wrap="square" lIns="0" tIns="0" rIns="0" bIns="0" rtlCol="0" anchor="t"/>
           <a:lstStyle/>
           <a:p>
-            <a:pPr indent="0" marL="0">
+            <a:pPr marL="0" indent="0">
               <a:buNone/>
             </a:pPr>
             <a:r>
@@ -1788,7 +1570,7 @@
           <a:bodyPr wrap="square" lIns="0" tIns="0" rIns="0" bIns="0" rtlCol="0" anchor="ctr"/>
           <a:lstStyle/>
           <a:p>
-            <a:pPr indent="0" marL="0">
+            <a:pPr marL="0" indent="0">
               <a:buNone/>
             </a:pPr>
             <a:r>
@@ -1797,9 +1579,113 @@
                   <a:srgbClr val="9FB8C2"/>
                 </a:solidFill>
               </a:rPr>
-              <a:t>Aman Vats · Symbiosis Institute of Technology, Pune</a:t>
+              <a:t>  Symbiosis Institute of Technology, Pune</a:t>
             </a:r>
             <a:endParaRPr lang="en-US" sz="1200" dirty="0"/>
+          </a:p>
+        </p:txBody>
+      </p:sp>
+      <p:sp>
+        <p:nvSpPr>
+          <p:cNvPr id="18" name="TextBox 17">
+            <a:extLst>
+              <a:ext uri="{FF2B5EF4-FFF2-40B4-BE49-F238E27FC236}">
+                <a16:creationId xmlns:a16="http://schemas.microsoft.com/office/drawing/2014/main" id="{E462FCC5-E20C-B9D0-143D-80E26D9C6BB3}"/>
+              </a:ext>
+            </a:extLst>
+          </p:cNvPr>
+          <p:cNvSpPr txBox="1"/>
+          <p:nvPr/>
+        </p:nvSpPr>
+        <p:spPr>
+          <a:xfrm>
+            <a:off x="7225705" y="14908"/>
+            <a:ext cx="2373549" cy="1107996"/>
+          </a:xfrm>
+          <a:prstGeom prst="rect">
+            <a:avLst/>
+          </a:prstGeom>
+          <a:noFill/>
+        </p:spPr>
+        <p:txBody>
+          <a:bodyPr wrap="square" rtlCol="0">
+            <a:spAutoFit/>
+          </a:bodyPr>
+          <a:lstStyle/>
+          <a:p>
+            <a:r>
+              <a:rPr lang="en-IN" dirty="0">
+                <a:solidFill>
+                  <a:srgbClr val="9FB8C2"/>
+                </a:solidFill>
+              </a:rPr>
+              <a:t>Team members:</a:t>
+            </a:r>
+            <a:br>
+              <a:rPr lang="en-IN" dirty="0">
+                <a:solidFill>
+                  <a:srgbClr val="9FB8C2"/>
+                </a:solidFill>
+              </a:rPr>
+            </a:br>
+            <a:r>
+              <a:rPr lang="en-IN" sz="1200" dirty="0">
+                <a:solidFill>
+                  <a:srgbClr val="9FB8C2"/>
+                </a:solidFill>
+              </a:rPr>
+              <a:t>Yudhveer - 2307012238</a:t>
+            </a:r>
+            <a:br>
+              <a:rPr lang="en-IN" sz="1200" dirty="0">
+                <a:solidFill>
+                  <a:srgbClr val="9FB8C2"/>
+                </a:solidFill>
+              </a:rPr>
+            </a:br>
+            <a:r>
+              <a:rPr lang="en-IN" sz="1200" dirty="0">
+                <a:solidFill>
+                  <a:srgbClr val="9FB8C2"/>
+                </a:solidFill>
+              </a:rPr>
+              <a:t>Aman Vats - 23070122025</a:t>
+            </a:r>
+            <a:br>
+              <a:rPr lang="en-IN" sz="1200" dirty="0">
+                <a:solidFill>
+                  <a:srgbClr val="9FB8C2"/>
+                </a:solidFill>
+              </a:rPr>
+            </a:br>
+            <a:r>
+              <a:rPr lang="en-IN" sz="1200" dirty="0">
+                <a:solidFill>
+                  <a:srgbClr val="9FB8C2"/>
+                </a:solidFill>
+              </a:rPr>
+              <a:t>Ojas Verma - 23070122153</a:t>
+            </a:r>
+            <a:br>
+              <a:rPr lang="en-IN" sz="1200" dirty="0">
+                <a:solidFill>
+                  <a:srgbClr val="9FB8C2"/>
+                </a:solidFill>
+              </a:rPr>
+            </a:br>
+            <a:r>
+              <a:rPr lang="en-IN" sz="1200" dirty="0">
+                <a:solidFill>
+                  <a:srgbClr val="9FB8C2"/>
+                </a:solidFill>
+              </a:rPr>
+              <a:t>Yug Choubey - 23070122239</a:t>
+            </a:r>
+            <a:endParaRPr lang="en-IN" dirty="0">
+              <a:solidFill>
+                <a:srgbClr val="9FB8C2"/>
+              </a:solidFill>
+            </a:endParaRPr>
           </a:p>
         </p:txBody>
       </p:sp>
@@ -1819,6 +1705,7 @@
         <a:solidFill>
           <a:srgbClr val="FFFFFF"/>
         </a:solidFill>
+        <a:effectLst/>
       </p:bgPr>
     </p:bg>
     <p:spTree>
@@ -1856,7 +1743,7 @@
           <a:bodyPr wrap="square" lIns="0" tIns="0" rIns="0" bIns="0" rtlCol="0" anchor="ctr"/>
           <a:lstStyle/>
           <a:p>
-            <a:pPr indent="0" marL="0">
+            <a:pPr marL="0" indent="0">
               <a:buNone/>
             </a:pPr>
             <a:r>
@@ -1900,7 +1787,7 @@
             <a:prstDash val="solid"/>
           </a:ln>
           <a:effectLst>
-            <a:outerShdw sx="100000" sy="100000" kx="0" ky="0" algn="bl" rotWithShape="0" blurRad="76200" dist="25400" dir="5400000">
+            <a:outerShdw blurRad="76200" dist="25400" dir="5400000" algn="bl" rotWithShape="0">
               <a:srgbClr val="000000">
                 <a:alpha val="12000"/>
               </a:srgbClr>
@@ -1929,7 +1816,7 @@
           <a:bodyPr wrap="square" lIns="0" tIns="0" rIns="0" bIns="0" rtlCol="0" anchor="ctr"/>
           <a:lstStyle/>
           <a:p>
-            <a:pPr indent="0" marL="0">
+            <a:pPr marL="0" indent="0">
               <a:buNone/>
             </a:pPr>
             <a:r>
@@ -1965,7 +1852,7 @@
           <a:bodyPr wrap="square" lIns="0" tIns="0" rIns="0" bIns="0" rtlCol="0" anchor="t"/>
           <a:lstStyle/>
           <a:p>
-            <a:pPr indent="0" marL="0">
+            <a:pPr marL="0" indent="0">
               <a:buNone/>
             </a:pPr>
             <a:r>
@@ -1979,7 +1866,7 @@
             <a:endParaRPr lang="en-US" sz="1200" dirty="0"/>
           </a:p>
           <a:p>
-            <a:pPr indent="0" marL="0">
+            <a:pPr marL="0" indent="0">
               <a:buNone/>
             </a:pPr>
             <a:r>
@@ -1993,7 +1880,7 @@
             <a:endParaRPr lang="en-US" sz="1200" dirty="0"/>
           </a:p>
           <a:p>
-            <a:pPr indent="0" marL="0">
+            <a:pPr marL="0" indent="0">
               <a:buNone/>
             </a:pPr>
             <a:r>
@@ -2058,7 +1945,7 @@
             <a:prstDash val="solid"/>
           </a:ln>
           <a:effectLst>
-            <a:outerShdw sx="100000" sy="100000" kx="0" ky="0" algn="bl" rotWithShape="0" blurRad="76200" dist="25400" dir="5400000">
+            <a:outerShdw blurRad="76200" dist="25400" dir="5400000" algn="bl" rotWithShape="0">
               <a:srgbClr val="000000">
                 <a:alpha val="12000"/>
               </a:srgbClr>
@@ -2087,7 +1974,7 @@
           <a:bodyPr wrap="square" lIns="0" tIns="0" rIns="0" bIns="0" rtlCol="0" anchor="ctr"/>
           <a:lstStyle/>
           <a:p>
-            <a:pPr indent="0" marL="0">
+            <a:pPr marL="0" indent="0">
               <a:buNone/>
             </a:pPr>
             <a:r>
@@ -2123,7 +2010,7 @@
           <a:bodyPr wrap="square" lIns="0" tIns="0" rIns="0" bIns="0" rtlCol="0" anchor="t"/>
           <a:lstStyle/>
           <a:p>
-            <a:pPr indent="0" marL="0">
+            <a:pPr marL="0" indent="0">
               <a:buNone/>
             </a:pPr>
             <a:r>
@@ -2137,7 +2024,7 @@
             <a:endParaRPr lang="en-US" sz="1200" dirty="0"/>
           </a:p>
           <a:p>
-            <a:pPr indent="0" marL="0">
+            <a:pPr marL="0" indent="0">
               <a:buNone/>
             </a:pPr>
             <a:r>
@@ -2151,7 +2038,7 @@
             <a:endParaRPr lang="en-US" sz="1200" dirty="0"/>
           </a:p>
           <a:p>
-            <a:pPr indent="0" marL="0">
+            <a:pPr marL="0" indent="0">
               <a:buNone/>
             </a:pPr>
             <a:r>
@@ -2216,7 +2103,7 @@
             <a:prstDash val="solid"/>
           </a:ln>
           <a:effectLst>
-            <a:outerShdw sx="100000" sy="100000" kx="0" ky="0" algn="bl" rotWithShape="0" blurRad="76200" dist="25400" dir="5400000">
+            <a:outerShdw blurRad="76200" dist="25400" dir="5400000" algn="bl" rotWithShape="0">
               <a:srgbClr val="000000">
                 <a:alpha val="12000"/>
               </a:srgbClr>
@@ -2245,7 +2132,7 @@
           <a:bodyPr wrap="square" lIns="0" tIns="0" rIns="0" bIns="0" rtlCol="0" anchor="ctr"/>
           <a:lstStyle/>
           <a:p>
-            <a:pPr indent="0" marL="0">
+            <a:pPr marL="0" indent="0">
               <a:buNone/>
             </a:pPr>
             <a:r>
@@ -2281,7 +2168,7 @@
           <a:bodyPr wrap="square" lIns="0" tIns="0" rIns="0" bIns="0" rtlCol="0" anchor="t"/>
           <a:lstStyle/>
           <a:p>
-            <a:pPr indent="0" marL="0">
+            <a:pPr marL="0" indent="0">
               <a:buNone/>
             </a:pPr>
             <a:r>
@@ -2295,7 +2182,7 @@
             <a:endParaRPr lang="en-US" sz="1200" dirty="0"/>
           </a:p>
           <a:p>
-            <a:pPr indent="0" marL="0">
+            <a:pPr marL="0" indent="0">
               <a:buNone/>
             </a:pPr>
             <a:r>
@@ -2309,7 +2196,7 @@
             <a:endParaRPr lang="en-US" sz="1200" dirty="0"/>
           </a:p>
           <a:p>
-            <a:pPr indent="0" marL="0">
+            <a:pPr marL="0" indent="0">
               <a:buNone/>
             </a:pPr>
             <a:r>
@@ -2345,7 +2232,7 @@
           <a:bodyPr wrap="square" lIns="0" tIns="0" rIns="0" bIns="0" rtlCol="0" anchor="ctr"/>
           <a:lstStyle/>
           <a:p>
-            <a:pPr indent="0" marL="0">
+            <a:pPr marL="0" indent="0">
               <a:buNone/>
             </a:pPr>
             <a:r>
@@ -2411,7 +2298,7 @@
           <a:bodyPr wrap="square" lIns="0" tIns="0" rIns="0" bIns="0" rtlCol="0" anchor="t"/>
           <a:lstStyle/>
           <a:p>
-            <a:pPr indent="0" marL="0">
+            <a:pPr marL="0" indent="0">
               <a:buNone/>
             </a:pPr>
             <a:r>
@@ -2447,7 +2334,7 @@
           <a:bodyPr wrap="square" lIns="0" tIns="0" rIns="0" bIns="0" rtlCol="0" anchor="t"/>
           <a:lstStyle/>
           <a:p>
-            <a:pPr indent="0" marL="0">
+            <a:pPr marL="0" indent="0">
               <a:buNone/>
             </a:pPr>
             <a:r>
@@ -2510,7 +2397,7 @@
           <a:bodyPr wrap="square" lIns="0" tIns="0" rIns="0" bIns="0" rtlCol="0" anchor="t"/>
           <a:lstStyle/>
           <a:p>
-            <a:pPr indent="0" marL="0">
+            <a:pPr marL="0" indent="0">
               <a:buNone/>
             </a:pPr>
             <a:r>
@@ -2546,7 +2433,7 @@
           <a:bodyPr wrap="square" lIns="0" tIns="0" rIns="0" bIns="0" rtlCol="0" anchor="t"/>
           <a:lstStyle/>
           <a:p>
-            <a:pPr indent="0" marL="0">
+            <a:pPr marL="0" indent="0">
               <a:buNone/>
             </a:pPr>
             <a:r>
@@ -2609,7 +2496,7 @@
           <a:bodyPr wrap="square" lIns="0" tIns="0" rIns="0" bIns="0" rtlCol="0" anchor="t"/>
           <a:lstStyle/>
           <a:p>
-            <a:pPr indent="0" marL="0">
+            <a:pPr marL="0" indent="0">
               <a:buNone/>
             </a:pPr>
             <a:r>
@@ -2645,7 +2532,7 @@
           <a:bodyPr wrap="square" lIns="0" tIns="0" rIns="0" bIns="0" rtlCol="0" anchor="t"/>
           <a:lstStyle/>
           <a:p>
-            <a:pPr indent="0" marL="0">
+            <a:pPr marL="0" indent="0">
               <a:buNone/>
             </a:pPr>
             <a:r>
@@ -2708,7 +2595,7 @@
           <a:bodyPr wrap="square" lIns="0" tIns="0" rIns="0" bIns="0" rtlCol="0" anchor="t"/>
           <a:lstStyle/>
           <a:p>
-            <a:pPr indent="0" marL="0">
+            <a:pPr marL="0" indent="0">
               <a:buNone/>
             </a:pPr>
             <a:r>
@@ -2744,7 +2631,7 @@
           <a:bodyPr wrap="square" lIns="0" tIns="0" rIns="0" bIns="0" rtlCol="0" anchor="t"/>
           <a:lstStyle/>
           <a:p>
-            <a:pPr indent="0" marL="0">
+            <a:pPr marL="0" indent="0">
               <a:buNone/>
             </a:pPr>
             <a:r>
@@ -2807,7 +2694,7 @@
           <a:bodyPr wrap="square" lIns="0" tIns="0" rIns="0" bIns="0" rtlCol="0" anchor="t"/>
           <a:lstStyle/>
           <a:p>
-            <a:pPr indent="0" marL="0">
+            <a:pPr marL="0" indent="0">
               <a:buNone/>
             </a:pPr>
             <a:r>
@@ -2843,7 +2730,7 @@
           <a:bodyPr wrap="square" lIns="0" tIns="0" rIns="0" bIns="0" rtlCol="0" anchor="t"/>
           <a:lstStyle/>
           <a:p>
-            <a:pPr indent="0" marL="0">
+            <a:pPr marL="0" indent="0">
               <a:buNone/>
             </a:pPr>
             <a:r>
@@ -2874,6 +2761,7 @@
         <a:solidFill>
           <a:srgbClr val="FFFFFF"/>
         </a:solidFill>
+        <a:effectLst/>
       </p:bgPr>
     </p:bg>
     <p:spTree>
@@ -2911,7 +2799,7 @@
           <a:bodyPr wrap="square" lIns="0" tIns="0" rIns="0" bIns="0" rtlCol="0" anchor="ctr"/>
           <a:lstStyle/>
           <a:p>
-            <a:pPr indent="0" marL="0">
+            <a:pPr marL="0" indent="0">
               <a:buNone/>
             </a:pPr>
             <a:r>
@@ -2955,7 +2843,7 @@
             <a:prstDash val="solid"/>
           </a:ln>
           <a:effectLst>
-            <a:outerShdw sx="100000" sy="100000" kx="0" ky="0" algn="bl" rotWithShape="0" blurRad="76200" dist="25400" dir="5400000">
+            <a:outerShdw blurRad="76200" dist="25400" dir="5400000" algn="bl" rotWithShape="0">
               <a:srgbClr val="000000">
                 <a:alpha val="12000"/>
               </a:srgbClr>
@@ -3009,7 +2897,7 @@
           <a:bodyPr wrap="square" lIns="0" tIns="0" rIns="0" bIns="0" rtlCol="0" anchor="ctr"/>
           <a:lstStyle/>
           <a:p>
-            <a:pPr algn="ctr" indent="0" marL="0">
+            <a:pPr marL="0" indent="0" algn="ctr">
               <a:buNone/>
             </a:pPr>
             <a:r>
@@ -3045,7 +2933,7 @@
           <a:bodyPr wrap="square" lIns="0" tIns="0" rIns="0" bIns="0" rtlCol="0" anchor="ctr"/>
           <a:lstStyle/>
           <a:p>
-            <a:pPr algn="ctr" indent="0" marL="0">
+            <a:pPr marL="0" indent="0" algn="ctr">
               <a:buNone/>
             </a:pPr>
             <a:r>
@@ -3081,7 +2969,7 @@
           <a:bodyPr wrap="square" lIns="0" tIns="0" rIns="0" bIns="0" rtlCol="0" anchor="t"/>
           <a:lstStyle/>
           <a:p>
-            <a:pPr algn="ctr" indent="0" marL="0">
+            <a:pPr marL="0" indent="0" algn="ctr">
               <a:buNone/>
             </a:pPr>
             <a:r>
@@ -3146,7 +3034,7 @@
             <a:prstDash val="solid"/>
           </a:ln>
           <a:effectLst>
-            <a:outerShdw sx="100000" sy="100000" kx="0" ky="0" algn="bl" rotWithShape="0" blurRad="76200" dist="25400" dir="5400000">
+            <a:outerShdw blurRad="76200" dist="25400" dir="5400000" algn="bl" rotWithShape="0">
               <a:srgbClr val="000000">
                 <a:alpha val="12000"/>
               </a:srgbClr>
@@ -3200,7 +3088,7 @@
           <a:bodyPr wrap="square" lIns="0" tIns="0" rIns="0" bIns="0" rtlCol="0" anchor="ctr"/>
           <a:lstStyle/>
           <a:p>
-            <a:pPr algn="ctr" indent="0" marL="0">
+            <a:pPr marL="0" indent="0" algn="ctr">
               <a:buNone/>
             </a:pPr>
             <a:r>
@@ -3236,7 +3124,7 @@
           <a:bodyPr wrap="square" lIns="0" tIns="0" rIns="0" bIns="0" rtlCol="0" anchor="ctr"/>
           <a:lstStyle/>
           <a:p>
-            <a:pPr algn="ctr" indent="0" marL="0">
+            <a:pPr marL="0" indent="0" algn="ctr">
               <a:buNone/>
             </a:pPr>
             <a:r>
@@ -3272,7 +3160,7 @@
           <a:bodyPr wrap="square" lIns="0" tIns="0" rIns="0" bIns="0" rtlCol="0" anchor="t"/>
           <a:lstStyle/>
           <a:p>
-            <a:pPr algn="ctr" indent="0" marL="0">
+            <a:pPr marL="0" indent="0" algn="ctr">
               <a:buNone/>
             </a:pPr>
             <a:r>
@@ -3337,7 +3225,7 @@
             <a:prstDash val="solid"/>
           </a:ln>
           <a:effectLst>
-            <a:outerShdw sx="100000" sy="100000" kx="0" ky="0" algn="bl" rotWithShape="0" blurRad="76200" dist="25400" dir="5400000">
+            <a:outerShdw blurRad="76200" dist="25400" dir="5400000" algn="bl" rotWithShape="0">
               <a:srgbClr val="000000">
                 <a:alpha val="12000"/>
               </a:srgbClr>
@@ -3391,7 +3279,7 @@
           <a:bodyPr wrap="square" lIns="0" tIns="0" rIns="0" bIns="0" rtlCol="0" anchor="ctr"/>
           <a:lstStyle/>
           <a:p>
-            <a:pPr algn="ctr" indent="0" marL="0">
+            <a:pPr marL="0" indent="0" algn="ctr">
               <a:buNone/>
             </a:pPr>
             <a:r>
@@ -3427,7 +3315,7 @@
           <a:bodyPr wrap="square" lIns="0" tIns="0" rIns="0" bIns="0" rtlCol="0" anchor="ctr"/>
           <a:lstStyle/>
           <a:p>
-            <a:pPr algn="ctr" indent="0" marL="0">
+            <a:pPr marL="0" indent="0" algn="ctr">
               <a:buNone/>
             </a:pPr>
             <a:r>
@@ -3463,7 +3351,7 @@
           <a:bodyPr wrap="square" lIns="0" tIns="0" rIns="0" bIns="0" rtlCol="0" anchor="t"/>
           <a:lstStyle/>
           <a:p>
-            <a:pPr algn="ctr" indent="0" marL="0">
+            <a:pPr marL="0" indent="0" algn="ctr">
               <a:buNone/>
             </a:pPr>
             <a:r>
@@ -3528,7 +3416,7 @@
             <a:prstDash val="solid"/>
           </a:ln>
           <a:effectLst>
-            <a:outerShdw sx="100000" sy="100000" kx="0" ky="0" algn="bl" rotWithShape="0" blurRad="76200" dist="25400" dir="5400000">
+            <a:outerShdw blurRad="76200" dist="25400" dir="5400000" algn="bl" rotWithShape="0">
               <a:srgbClr val="000000">
                 <a:alpha val="12000"/>
               </a:srgbClr>
@@ -3582,7 +3470,7 @@
           <a:bodyPr wrap="square" lIns="0" tIns="0" rIns="0" bIns="0" rtlCol="0" anchor="ctr"/>
           <a:lstStyle/>
           <a:p>
-            <a:pPr algn="ctr" indent="0" marL="0">
+            <a:pPr marL="0" indent="0" algn="ctr">
               <a:buNone/>
             </a:pPr>
             <a:r>
@@ -3618,7 +3506,7 @@
           <a:bodyPr wrap="square" lIns="0" tIns="0" rIns="0" bIns="0" rtlCol="0" anchor="ctr"/>
           <a:lstStyle/>
           <a:p>
-            <a:pPr algn="ctr" indent="0" marL="0">
+            <a:pPr marL="0" indent="0" algn="ctr">
               <a:buNone/>
             </a:pPr>
             <a:r>
@@ -3654,7 +3542,7 @@
           <a:bodyPr wrap="square" lIns="0" tIns="0" rIns="0" bIns="0" rtlCol="0" anchor="t"/>
           <a:lstStyle/>
           <a:p>
-            <a:pPr algn="ctr" indent="0" marL="0">
+            <a:pPr marL="0" indent="0" algn="ctr">
               <a:buNone/>
             </a:pPr>
             <a:r>
@@ -3719,7 +3607,7 @@
             <a:prstDash val="solid"/>
           </a:ln>
           <a:effectLst>
-            <a:outerShdw sx="100000" sy="100000" kx="0" ky="0" algn="bl" rotWithShape="0" blurRad="76200" dist="25400" dir="5400000">
+            <a:outerShdw blurRad="76200" dist="25400" dir="5400000" algn="bl" rotWithShape="0">
               <a:srgbClr val="000000">
                 <a:alpha val="12000"/>
               </a:srgbClr>
@@ -3773,7 +3661,7 @@
           <a:bodyPr wrap="square" lIns="0" tIns="0" rIns="0" bIns="0" rtlCol="0" anchor="ctr"/>
           <a:lstStyle/>
           <a:p>
-            <a:pPr algn="ctr" indent="0" marL="0">
+            <a:pPr marL="0" indent="0" algn="ctr">
               <a:buNone/>
             </a:pPr>
             <a:r>
@@ -3809,7 +3697,7 @@
           <a:bodyPr wrap="square" lIns="0" tIns="0" rIns="0" bIns="0" rtlCol="0" anchor="ctr"/>
           <a:lstStyle/>
           <a:p>
-            <a:pPr algn="ctr" indent="0" marL="0">
+            <a:pPr marL="0" indent="0" algn="ctr">
               <a:buNone/>
             </a:pPr>
             <a:r>
@@ -3845,7 +3733,7 @@
           <a:bodyPr wrap="square" lIns="0" tIns="0" rIns="0" bIns="0" rtlCol="0" anchor="t"/>
           <a:lstStyle/>
           <a:p>
-            <a:pPr algn="ctr" indent="0" marL="0">
+            <a:pPr marL="0" indent="0" algn="ctr">
               <a:buNone/>
             </a:pPr>
             <a:r>
@@ -3910,7 +3798,7 @@
             <a:prstDash val="solid"/>
           </a:ln>
           <a:effectLst>
-            <a:outerShdw sx="100000" sy="100000" kx="0" ky="0" algn="bl" rotWithShape="0" blurRad="76200" dist="25400" dir="5400000">
+            <a:outerShdw blurRad="76200" dist="25400" dir="5400000" algn="bl" rotWithShape="0">
               <a:srgbClr val="000000">
                 <a:alpha val="12000"/>
               </a:srgbClr>
@@ -3964,7 +3852,7 @@
           <a:bodyPr wrap="square" lIns="0" tIns="0" rIns="0" bIns="0" rtlCol="0" anchor="ctr"/>
           <a:lstStyle/>
           <a:p>
-            <a:pPr algn="ctr" indent="0" marL="0">
+            <a:pPr marL="0" indent="0" algn="ctr">
               <a:buNone/>
             </a:pPr>
             <a:r>
@@ -4000,7 +3888,7 @@
           <a:bodyPr wrap="square" lIns="0" tIns="0" rIns="0" bIns="0" rtlCol="0" anchor="ctr"/>
           <a:lstStyle/>
           <a:p>
-            <a:pPr algn="ctr" indent="0" marL="0">
+            <a:pPr marL="0" indent="0" algn="ctr">
               <a:buNone/>
             </a:pPr>
             <a:r>
@@ -4036,7 +3924,7 @@
           <a:bodyPr wrap="square" lIns="0" tIns="0" rIns="0" bIns="0" rtlCol="0" anchor="t"/>
           <a:lstStyle/>
           <a:p>
-            <a:pPr algn="ctr" indent="0" marL="0">
+            <a:pPr marL="0" indent="0" algn="ctr">
               <a:buNone/>
             </a:pPr>
             <a:r>
@@ -4099,7 +3987,7 @@
           <a:bodyPr wrap="square" lIns="0" tIns="0" rIns="0" bIns="0" rtlCol="0" anchor="ctr"/>
           <a:lstStyle/>
           <a:p>
-            <a:pPr indent="0" marL="0">
+            <a:pPr marL="0" indent="0">
               <a:buNone/>
             </a:pPr>
             <a:r>
@@ -4135,7 +4023,7 @@
           <a:bodyPr wrap="square" lIns="0" tIns="0" rIns="0" bIns="0" rtlCol="0" anchor="t"/>
           <a:lstStyle/>
           <a:p>
-            <a:pPr indent="0" marL="0">
+            <a:pPr marL="0" indent="0">
               <a:spcAft>
                 <a:spcPts val="400"/>
               </a:spcAft>
@@ -4155,7 +4043,7 @@
             <a:endParaRPr lang="en-US" sz="1200" dirty="0"/>
           </a:p>
           <a:p>
-            <a:pPr indent="0" marL="0">
+            <a:pPr marL="0" indent="0">
               <a:spcAft>
                 <a:spcPts val="400"/>
               </a:spcAft>
@@ -4175,7 +4063,7 @@
             <a:endParaRPr lang="en-US" sz="1200" dirty="0"/>
           </a:p>
           <a:p>
-            <a:pPr indent="0" marL="0">
+            <a:pPr marL="0" indent="0">
               <a:spcAft>
                 <a:spcPts val="400"/>
               </a:spcAft>
@@ -4217,7 +4105,7 @@
           <a:bodyPr wrap="square" lIns="0" tIns="0" rIns="0" bIns="0" rtlCol="0" anchor="ctr"/>
           <a:lstStyle/>
           <a:p>
-            <a:pPr indent="0" marL="0">
+            <a:pPr marL="0" indent="0">
               <a:buNone/>
             </a:pPr>
             <a:r>
@@ -4280,7 +4168,7 @@
           <a:bodyPr wrap="square" lIns="0" tIns="0" rIns="0" bIns="0" rtlCol="0" anchor="ctr"/>
           <a:lstStyle/>
           <a:p>
-            <a:pPr indent="0" marL="0">
+            <a:pPr marL="0" indent="0">
               <a:buNone/>
             </a:pPr>
             <a:r>
@@ -4387,6 +4275,7 @@
         <a:solidFill>
           <a:srgbClr val="FFFFFF"/>
         </a:solidFill>
+        <a:effectLst/>
       </p:bgPr>
     </p:bg>
     <p:spTree>
@@ -4424,7 +4313,7 @@
           <a:bodyPr wrap="square" lIns="0" tIns="0" rIns="0" bIns="0" rtlCol="0" anchor="ctr"/>
           <a:lstStyle/>
           <a:p>
-            <a:pPr indent="0" marL="0">
+            <a:pPr marL="0" indent="0">
               <a:buNone/>
             </a:pPr>
             <a:r>
@@ -4468,7 +4357,7 @@
             <a:prstDash val="solid"/>
           </a:ln>
           <a:effectLst>
-            <a:outerShdw sx="100000" sy="100000" kx="0" ky="0" algn="bl" rotWithShape="0" blurRad="76200" dist="25400" dir="5400000">
+            <a:outerShdw blurRad="76200" dist="25400" dir="5400000" algn="bl" rotWithShape="0">
               <a:srgbClr val="000000">
                 <a:alpha val="12000"/>
               </a:srgbClr>
@@ -4524,7 +4413,7 @@
           <a:bodyPr wrap="square" lIns="0" tIns="0" rIns="0" bIns="0" rtlCol="0" anchor="ctr"/>
           <a:lstStyle/>
           <a:p>
-            <a:pPr algn="ctr" indent="0" marL="0">
+            <a:pPr marL="0" indent="0" algn="ctr">
               <a:buNone/>
             </a:pPr>
             <a:r>
@@ -4560,7 +4449,7 @@
           <a:bodyPr wrap="square" lIns="0" tIns="0" rIns="0" bIns="0" rtlCol="0" anchor="ctr"/>
           <a:lstStyle/>
           <a:p>
-            <a:pPr indent="0" marL="0">
+            <a:pPr marL="0" indent="0">
               <a:buNone/>
             </a:pPr>
             <a:r>
@@ -4596,7 +4485,7 @@
           <a:bodyPr wrap="square" lIns="0" tIns="0" rIns="0" bIns="0" rtlCol="0" anchor="t"/>
           <a:lstStyle/>
           <a:p>
-            <a:pPr indent="0" marL="0">
+            <a:pPr marL="0" indent="0">
               <a:buNone/>
             </a:pPr>
             <a:r>
@@ -4637,7 +4526,7 @@
             <a:prstDash val="solid"/>
           </a:ln>
           <a:effectLst>
-            <a:outerShdw sx="100000" sy="100000" kx="0" ky="0" algn="bl" rotWithShape="0" blurRad="76200" dist="25400" dir="5400000">
+            <a:outerShdw blurRad="76200" dist="25400" dir="5400000" algn="bl" rotWithShape="0">
               <a:srgbClr val="000000">
                 <a:alpha val="12000"/>
               </a:srgbClr>
@@ -4693,7 +4582,7 @@
           <a:bodyPr wrap="square" lIns="0" tIns="0" rIns="0" bIns="0" rtlCol="0" anchor="ctr"/>
           <a:lstStyle/>
           <a:p>
-            <a:pPr algn="ctr" indent="0" marL="0">
+            <a:pPr marL="0" indent="0" algn="ctr">
               <a:buNone/>
             </a:pPr>
             <a:r>
@@ -4729,7 +4618,7 @@
           <a:bodyPr wrap="square" lIns="0" tIns="0" rIns="0" bIns="0" rtlCol="0" anchor="ctr"/>
           <a:lstStyle/>
           <a:p>
-            <a:pPr indent="0" marL="0">
+            <a:pPr marL="0" indent="0">
               <a:buNone/>
             </a:pPr>
             <a:r>
@@ -4765,7 +4654,7 @@
           <a:bodyPr wrap="square" lIns="0" tIns="0" rIns="0" bIns="0" rtlCol="0" anchor="t"/>
           <a:lstStyle/>
           <a:p>
-            <a:pPr indent="0" marL="0">
+            <a:pPr marL="0" indent="0">
               <a:buNone/>
             </a:pPr>
             <a:r>
@@ -4806,7 +4695,7 @@
             <a:prstDash val="solid"/>
           </a:ln>
           <a:effectLst>
-            <a:outerShdw sx="100000" sy="100000" kx="0" ky="0" algn="bl" rotWithShape="0" blurRad="76200" dist="25400" dir="5400000">
+            <a:outerShdw blurRad="76200" dist="25400" dir="5400000" algn="bl" rotWithShape="0">
               <a:srgbClr val="000000">
                 <a:alpha val="12000"/>
               </a:srgbClr>
@@ -4862,7 +4751,7 @@
           <a:bodyPr wrap="square" lIns="0" tIns="0" rIns="0" bIns="0" rtlCol="0" anchor="ctr"/>
           <a:lstStyle/>
           <a:p>
-            <a:pPr algn="ctr" indent="0" marL="0">
+            <a:pPr marL="0" indent="0" algn="ctr">
               <a:buNone/>
             </a:pPr>
             <a:r>
@@ -4898,7 +4787,7 @@
           <a:bodyPr wrap="square" lIns="0" tIns="0" rIns="0" bIns="0" rtlCol="0" anchor="ctr"/>
           <a:lstStyle/>
           <a:p>
-            <a:pPr indent="0" marL="0">
+            <a:pPr marL="0" indent="0">
               <a:buNone/>
             </a:pPr>
             <a:r>
@@ -4934,7 +4823,7 @@
           <a:bodyPr wrap="square" lIns="0" tIns="0" rIns="0" bIns="0" rtlCol="0" anchor="t"/>
           <a:lstStyle/>
           <a:p>
-            <a:pPr indent="0" marL="0">
+            <a:pPr marL="0" indent="0">
               <a:buNone/>
             </a:pPr>
             <a:r>
@@ -4975,7 +4864,7 @@
             <a:prstDash val="solid"/>
           </a:ln>
           <a:effectLst>
-            <a:outerShdw sx="100000" sy="100000" kx="0" ky="0" algn="bl" rotWithShape="0" blurRad="76200" dist="25400" dir="5400000">
+            <a:outerShdw blurRad="76200" dist="25400" dir="5400000" algn="bl" rotWithShape="0">
               <a:srgbClr val="000000">
                 <a:alpha val="12000"/>
               </a:srgbClr>
@@ -5031,7 +4920,7 @@
           <a:bodyPr wrap="square" lIns="0" tIns="0" rIns="0" bIns="0" rtlCol="0" anchor="ctr"/>
           <a:lstStyle/>
           <a:p>
-            <a:pPr algn="ctr" indent="0" marL="0">
+            <a:pPr marL="0" indent="0" algn="ctr">
               <a:buNone/>
             </a:pPr>
             <a:r>
@@ -5067,7 +4956,7 @@
           <a:bodyPr wrap="square" lIns="0" tIns="0" rIns="0" bIns="0" rtlCol="0" anchor="ctr"/>
           <a:lstStyle/>
           <a:p>
-            <a:pPr indent="0" marL="0">
+            <a:pPr marL="0" indent="0">
               <a:buNone/>
             </a:pPr>
             <a:r>
@@ -5103,7 +4992,7 @@
           <a:bodyPr wrap="square" lIns="0" tIns="0" rIns="0" bIns="0" rtlCol="0" anchor="t"/>
           <a:lstStyle/>
           <a:p>
-            <a:pPr indent="0" marL="0">
+            <a:pPr marL="0" indent="0">
               <a:buNone/>
             </a:pPr>
             <a:r>
@@ -5144,7 +5033,7 @@
             <a:prstDash val="solid"/>
           </a:ln>
           <a:effectLst>
-            <a:outerShdw sx="100000" sy="100000" kx="0" ky="0" algn="bl" rotWithShape="0" blurRad="76200" dist="25400" dir="5400000">
+            <a:outerShdw blurRad="76200" dist="25400" dir="5400000" algn="bl" rotWithShape="0">
               <a:srgbClr val="000000">
                 <a:alpha val="12000"/>
               </a:srgbClr>
@@ -5200,7 +5089,7 @@
           <a:bodyPr wrap="square" lIns="0" tIns="0" rIns="0" bIns="0" rtlCol="0" anchor="ctr"/>
           <a:lstStyle/>
           <a:p>
-            <a:pPr algn="ctr" indent="0" marL="0">
+            <a:pPr marL="0" indent="0" algn="ctr">
               <a:buNone/>
             </a:pPr>
             <a:r>
@@ -5236,7 +5125,7 @@
           <a:bodyPr wrap="square" lIns="0" tIns="0" rIns="0" bIns="0" rtlCol="0" anchor="ctr"/>
           <a:lstStyle/>
           <a:p>
-            <a:pPr indent="0" marL="0">
+            <a:pPr marL="0" indent="0">
               <a:buNone/>
             </a:pPr>
             <a:r>
@@ -5272,7 +5161,7 @@
           <a:bodyPr wrap="square" lIns="0" tIns="0" rIns="0" bIns="0" rtlCol="0" anchor="t"/>
           <a:lstStyle/>
           <a:p>
-            <a:pPr indent="0" marL="0">
+            <a:pPr marL="0" indent="0">
               <a:buNone/>
             </a:pPr>
             <a:r>
@@ -5313,7 +5202,7 @@
             <a:prstDash val="solid"/>
           </a:ln>
           <a:effectLst>
-            <a:outerShdw sx="100000" sy="100000" kx="0" ky="0" algn="bl" rotWithShape="0" blurRad="76200" dist="25400" dir="5400000">
+            <a:outerShdw blurRad="76200" dist="25400" dir="5400000" algn="bl" rotWithShape="0">
               <a:srgbClr val="000000">
                 <a:alpha val="12000"/>
               </a:srgbClr>
@@ -5369,7 +5258,7 @@
           <a:bodyPr wrap="square" lIns="0" tIns="0" rIns="0" bIns="0" rtlCol="0" anchor="ctr"/>
           <a:lstStyle/>
           <a:p>
-            <a:pPr algn="ctr" indent="0" marL="0">
+            <a:pPr marL="0" indent="0" algn="ctr">
               <a:buNone/>
             </a:pPr>
             <a:r>
@@ -5405,7 +5294,7 @@
           <a:bodyPr wrap="square" lIns="0" tIns="0" rIns="0" bIns="0" rtlCol="0" anchor="ctr"/>
           <a:lstStyle/>
           <a:p>
-            <a:pPr indent="0" marL="0">
+            <a:pPr marL="0" indent="0">
               <a:buNone/>
             </a:pPr>
             <a:r>
@@ -5441,7 +5330,7 @@
           <a:bodyPr wrap="square" lIns="0" tIns="0" rIns="0" bIns="0" rtlCol="0" anchor="t"/>
           <a:lstStyle/>
           <a:p>
-            <a:pPr indent="0" marL="0">
+            <a:pPr marL="0" indent="0">
               <a:buNone/>
             </a:pPr>
             <a:r>
@@ -5472,6 +5361,7 @@
         <a:solidFill>
           <a:srgbClr val="0B1F2A"/>
         </a:solidFill>
+        <a:effectLst/>
       </p:bgPr>
     </p:bg>
     <p:spTree>
@@ -5509,7 +5399,7 @@
           <a:bodyPr wrap="square" lIns="0" tIns="0" rIns="0" bIns="0" rtlCol="0" anchor="ctr"/>
           <a:lstStyle/>
           <a:p>
-            <a:pPr indent="0" marL="0">
+            <a:pPr marL="0" indent="0">
               <a:buNone/>
             </a:pPr>
             <a:r>
@@ -5573,7 +5463,7 @@
           <a:bodyPr wrap="square" lIns="0" tIns="0" rIns="0" bIns="0" rtlCol="0" anchor="ctr"/>
           <a:lstStyle/>
           <a:p>
-            <a:pPr algn="ctr" indent="0" marL="0">
+            <a:pPr marL="0" indent="0" algn="ctr">
               <a:buNone/>
             </a:pPr>
             <a:r>
@@ -5609,7 +5499,7 @@
           <a:bodyPr wrap="square" lIns="0" tIns="0" rIns="0" bIns="0" rtlCol="0" anchor="ctr"/>
           <a:lstStyle/>
           <a:p>
-            <a:pPr indent="0" marL="0">
+            <a:pPr marL="0" indent="0">
               <a:buNone/>
             </a:pPr>
             <a:r>
@@ -5645,7 +5535,7 @@
           <a:bodyPr wrap="square" lIns="0" tIns="0" rIns="0" bIns="0" rtlCol="0" anchor="ctr"/>
           <a:lstStyle/>
           <a:p>
-            <a:pPr indent="0" marL="0">
+            <a:pPr marL="0" indent="0">
               <a:buNone/>
             </a:pPr>
             <a:r>
@@ -5706,7 +5596,7 @@
           <a:bodyPr wrap="square" lIns="0" tIns="0" rIns="0" bIns="0" rtlCol="0" anchor="ctr"/>
           <a:lstStyle/>
           <a:p>
-            <a:pPr algn="ctr" indent="0" marL="0">
+            <a:pPr marL="0" indent="0" algn="ctr">
               <a:buNone/>
             </a:pPr>
             <a:r>
@@ -5742,7 +5632,7 @@
           <a:bodyPr wrap="square" lIns="0" tIns="0" rIns="0" bIns="0" rtlCol="0" anchor="ctr"/>
           <a:lstStyle/>
           <a:p>
-            <a:pPr indent="0" marL="0">
+            <a:pPr marL="0" indent="0">
               <a:buNone/>
             </a:pPr>
             <a:r>
@@ -5778,7 +5668,7 @@
           <a:bodyPr wrap="square" lIns="0" tIns="0" rIns="0" bIns="0" rtlCol="0" anchor="ctr"/>
           <a:lstStyle/>
           <a:p>
-            <a:pPr indent="0" marL="0">
+            <a:pPr marL="0" indent="0">
               <a:buNone/>
             </a:pPr>
             <a:r>
@@ -5839,7 +5729,7 @@
           <a:bodyPr wrap="square" lIns="0" tIns="0" rIns="0" bIns="0" rtlCol="0" anchor="ctr"/>
           <a:lstStyle/>
           <a:p>
-            <a:pPr algn="ctr" indent="0" marL="0">
+            <a:pPr marL="0" indent="0" algn="ctr">
               <a:buNone/>
             </a:pPr>
             <a:r>
@@ -5875,7 +5765,7 @@
           <a:bodyPr wrap="square" lIns="0" tIns="0" rIns="0" bIns="0" rtlCol="0" anchor="ctr"/>
           <a:lstStyle/>
           <a:p>
-            <a:pPr indent="0" marL="0">
+            <a:pPr marL="0" indent="0">
               <a:buNone/>
             </a:pPr>
             <a:r>
@@ -5911,7 +5801,7 @@
           <a:bodyPr wrap="square" lIns="0" tIns="0" rIns="0" bIns="0" rtlCol="0" anchor="ctr"/>
           <a:lstStyle/>
           <a:p>
-            <a:pPr indent="0" marL="0">
+            <a:pPr marL="0" indent="0">
               <a:buNone/>
             </a:pPr>
             <a:r>
@@ -5972,7 +5862,7 @@
           <a:bodyPr wrap="square" lIns="0" tIns="0" rIns="0" bIns="0" rtlCol="0" anchor="ctr"/>
           <a:lstStyle/>
           <a:p>
-            <a:pPr algn="ctr" indent="0" marL="0">
+            <a:pPr marL="0" indent="0" algn="ctr">
               <a:buNone/>
             </a:pPr>
             <a:r>
@@ -6008,7 +5898,7 @@
           <a:bodyPr wrap="square" lIns="0" tIns="0" rIns="0" bIns="0" rtlCol="0" anchor="ctr"/>
           <a:lstStyle/>
           <a:p>
-            <a:pPr indent="0" marL="0">
+            <a:pPr marL="0" indent="0">
               <a:buNone/>
             </a:pPr>
             <a:r>
@@ -6044,7 +5934,7 @@
           <a:bodyPr wrap="square" lIns="0" tIns="0" rIns="0" bIns="0" rtlCol="0" anchor="ctr"/>
           <a:lstStyle/>
           <a:p>
-            <a:pPr indent="0" marL="0">
+            <a:pPr marL="0" indent="0">
               <a:buNone/>
             </a:pPr>
             <a:r>
@@ -6107,7 +5997,7 @@
           <a:bodyPr wrap="square" lIns="0" tIns="0" rIns="0" bIns="0" rtlCol="0" anchor="ctr"/>
           <a:lstStyle/>
           <a:p>
-            <a:pPr indent="0" marL="0">
+            <a:pPr marL="0" indent="0">
               <a:buNone/>
             </a:pPr>
             <a:r>
@@ -6118,9 +6008,6 @@
               </a:rPr>
               <a:t>Next: </a:t>
             </a:r>
-            <a:pPr indent="0" marL="0">
-              <a:buNone/>
-            </a:pPr>
             <a:r>
               <a:rPr lang="en-US" sz="1400" dirty="0">
                 <a:solidFill>
@@ -6434,4 +6321,299 @@
     </a:ext>
   </a:extLst>
 </a:theme>
+</file>
+
+<file path=ppt/theme/theme2.xml><?xml version="1.0" encoding="utf-8"?>
+<a:theme xmlns:a="http://schemas.openxmlformats.org/drawingml/2006/main" name="Office Theme">
+  <a:themeElements>
+    <a:clrScheme name="Office">
+      <a:dk1>
+        <a:sysClr val="windowText" lastClr="000000"/>
+      </a:dk1>
+      <a:lt1>
+        <a:sysClr val="window" lastClr="FFFFFF"/>
+      </a:lt1>
+      <a:dk2>
+        <a:srgbClr val="44546A"/>
+      </a:dk2>
+      <a:lt2>
+        <a:srgbClr val="E7E6E6"/>
+      </a:lt2>
+      <a:accent1>
+        <a:srgbClr val="4472C4"/>
+      </a:accent1>
+      <a:accent2>
+        <a:srgbClr val="ED7D31"/>
+      </a:accent2>
+      <a:accent3>
+        <a:srgbClr val="A5A5A5"/>
+      </a:accent3>
+      <a:accent4>
+        <a:srgbClr val="FFC000"/>
+      </a:accent4>
+      <a:accent5>
+        <a:srgbClr val="5B9BD5"/>
+      </a:accent5>
+      <a:accent6>
+        <a:srgbClr val="70AD47"/>
+      </a:accent6>
+      <a:hlink>
+        <a:srgbClr val="0563C1"/>
+      </a:hlink>
+      <a:folHlink>
+        <a:srgbClr val="954F72"/>
+      </a:folHlink>
+    </a:clrScheme>
+    <a:fontScheme name="Office">
+      <a:majorFont>
+        <a:latin typeface="Calibri Light" panose="020F0302020204030204"/>
+        <a:ea typeface=""/>
+        <a:cs typeface=""/>
+        <a:font script="Jpan" typeface="游ゴシック Light"/>
+        <a:font script="Hang" typeface="맑은 고딕"/>
+        <a:font script="Hans" typeface="等线 Light"/>
+        <a:font script="Hant" typeface="新細明體"/>
+        <a:font script="Arab" typeface="Times New Roman"/>
+        <a:font script="Hebr" typeface="Times New Roman"/>
+        <a:font script="Thai" typeface="Angsana New"/>
+        <a:font script="Ethi" typeface="Nyala"/>
+        <a:font script="Beng" typeface="Vrinda"/>
+        <a:font script="Gujr" typeface="Shruti"/>
+        <a:font script="Khmr" typeface="MoolBoran"/>
+        <a:font script="Knda" typeface="Tunga"/>
+        <a:font script="Guru" typeface="Raavi"/>
+        <a:font script="Cans" typeface="Euphemia"/>
+        <a:font script="Cher" typeface="Plantagenet Cherokee"/>
+        <a:font script="Yiii" typeface="Microsoft Yi Baiti"/>
+        <a:font script="Tibt" typeface="Microsoft Himalaya"/>
+        <a:font script="Thaa" typeface="MV Boli"/>
+        <a:font script="Deva" typeface="Mangal"/>
+        <a:font script="Telu" typeface="Gautami"/>
+        <a:font script="Taml" typeface="Latha"/>
+        <a:font script="Syrc" typeface="Estrangelo Edessa"/>
+        <a:font script="Orya" typeface="Kalinga"/>
+        <a:font script="Mlym" typeface="Kartika"/>
+        <a:font script="Laoo" typeface="DokChampa"/>
+        <a:font script="Sinh" typeface="Iskoola Pota"/>
+        <a:font script="Mong" typeface="Mongolian Baiti"/>
+        <a:font script="Viet" typeface="Times New Roman"/>
+        <a:font script="Uigh" typeface="Microsoft Uighur"/>
+        <a:font script="Geor" typeface="Sylfaen"/>
+        <a:font script="Armn" typeface="Arial"/>
+        <a:font script="Bugi" typeface="Leelawadee UI"/>
+        <a:font script="Bopo" typeface="Microsoft JhengHei"/>
+        <a:font script="Java" typeface="Javanese Text"/>
+        <a:font script="Lisu" typeface="Segoe UI"/>
+        <a:font script="Mymr" typeface="Myanmar Text"/>
+        <a:font script="Nkoo" typeface="Ebrima"/>
+        <a:font script="Olck" typeface="Nirmala UI"/>
+        <a:font script="Osma" typeface="Ebrima"/>
+        <a:font script="Phag" typeface="Phagspa"/>
+        <a:font script="Syrn" typeface="Estrangelo Edessa"/>
+        <a:font script="Syrj" typeface="Estrangelo Edessa"/>
+        <a:font script="Syre" typeface="Estrangelo Edessa"/>
+        <a:font script="Sora" typeface="Nirmala UI"/>
+        <a:font script="Tale" typeface="Microsoft Tai Le"/>
+        <a:font script="Talu" typeface="Microsoft New Tai Lue"/>
+        <a:font script="Tfng" typeface="Ebrima"/>
+      </a:majorFont>
+      <a:minorFont>
+        <a:latin typeface="Calibri" panose="020F0502020204030204"/>
+        <a:ea typeface=""/>
+        <a:cs typeface=""/>
+        <a:font script="Jpan" typeface="游ゴシック"/>
+        <a:font script="Hang" typeface="맑은 고딕"/>
+        <a:font script="Hans" typeface="等线"/>
+        <a:font script="Hant" typeface="新細明體"/>
+        <a:font script="Arab" typeface="Arial"/>
+        <a:font script="Hebr" typeface="Arial"/>
+        <a:font script="Thai" typeface="Cordia New"/>
+        <a:font script="Ethi" typeface="Nyala"/>
+        <a:font script="Beng" typeface="Vrinda"/>
+        <a:font script="Gujr" typeface="Shruti"/>
+        <a:font script="Khmr" typeface="DaunPenh"/>
+        <a:font script="Knda" typeface="Tunga"/>
+        <a:font script="Guru" typeface="Raavi"/>
+        <a:font script="Cans" typeface="Euphemia"/>
+        <a:font script="Cher" typeface="Plantagenet Cherokee"/>
+        <a:font script="Yiii" typeface="Microsoft Yi Baiti"/>
+        <a:font script="Tibt" typeface="Microsoft Himalaya"/>
+        <a:font script="Thaa" typeface="MV Boli"/>
+        <a:font script="Deva" typeface="Mangal"/>
+        <a:font script="Telu" typeface="Gautami"/>
+        <a:font script="Taml" typeface="Latha"/>
+        <a:font script="Syrc" typeface="Estrangelo Edessa"/>
+        <a:font script="Orya" typeface="Kalinga"/>
+        <a:font script="Mlym" typeface="Kartika"/>
+        <a:font script="Laoo" typeface="DokChampa"/>
+        <a:font script="Sinh" typeface="Iskoola Pota"/>
+        <a:font script="Mong" typeface="Mongolian Baiti"/>
+        <a:font script="Viet" typeface="Arial"/>
+        <a:font script="Uigh" typeface="Microsoft Uighur"/>
+        <a:font script="Geor" typeface="Sylfaen"/>
+        <a:font script="Armn" typeface="Arial"/>
+        <a:font script="Bugi" typeface="Leelawadee UI"/>
+        <a:font script="Bopo" typeface="Microsoft JhengHei"/>
+        <a:font script="Java" typeface="Javanese Text"/>
+        <a:font script="Lisu" typeface="Segoe UI"/>
+        <a:font script="Mymr" typeface="Myanmar Text"/>
+        <a:font script="Nkoo" typeface="Ebrima"/>
+        <a:font script="Olck" typeface="Nirmala UI"/>
+        <a:font script="Osma" typeface="Ebrima"/>
+        <a:font script="Phag" typeface="Phagspa"/>
+        <a:font script="Syrn" typeface="Estrangelo Edessa"/>
+        <a:font script="Syrj" typeface="Estrangelo Edessa"/>
+        <a:font script="Syre" typeface="Estrangelo Edessa"/>
+        <a:font script="Sora" typeface="Nirmala UI"/>
+        <a:font script="Tale" typeface="Microsoft Tai Le"/>
+        <a:font script="Talu" typeface="Microsoft New Tai Lue"/>
+        <a:font script="Tfng" typeface="Ebrima"/>
+      </a:minorFont>
+    </a:fontScheme>
+    <a:fmtScheme name="Office">
+      <a:fillStyleLst>
+        <a:solidFill>
+          <a:schemeClr val="phClr"/>
+        </a:solidFill>
+        <a:gradFill rotWithShape="1">
+          <a:gsLst>
+            <a:gs pos="0">
+              <a:schemeClr val="phClr">
+                <a:lumMod val="110000"/>
+                <a:satMod val="105000"/>
+                <a:tint val="67000"/>
+              </a:schemeClr>
+            </a:gs>
+            <a:gs pos="50000">
+              <a:schemeClr val="phClr">
+                <a:lumMod val="105000"/>
+                <a:satMod val="103000"/>
+                <a:tint val="73000"/>
+              </a:schemeClr>
+            </a:gs>
+            <a:gs pos="100000">
+              <a:schemeClr val="phClr">
+                <a:lumMod val="105000"/>
+                <a:satMod val="109000"/>
+                <a:tint val="81000"/>
+              </a:schemeClr>
+            </a:gs>
+          </a:gsLst>
+          <a:lin ang="5400000" scaled="0"/>
+        </a:gradFill>
+        <a:gradFill rotWithShape="1">
+          <a:gsLst>
+            <a:gs pos="0">
+              <a:schemeClr val="phClr">
+                <a:satMod val="103000"/>
+                <a:lumMod val="102000"/>
+                <a:tint val="94000"/>
+              </a:schemeClr>
+            </a:gs>
+            <a:gs pos="50000">
+              <a:schemeClr val="phClr">
+                <a:satMod val="110000"/>
+                <a:lumMod val="100000"/>
+                <a:shade val="100000"/>
+              </a:schemeClr>
+            </a:gs>
+            <a:gs pos="100000">
+              <a:schemeClr val="phClr">
+                <a:lumMod val="99000"/>
+                <a:satMod val="120000"/>
+                <a:shade val="78000"/>
+              </a:schemeClr>
+            </a:gs>
+          </a:gsLst>
+          <a:lin ang="5400000" scaled="0"/>
+        </a:gradFill>
+      </a:fillStyleLst>
+      <a:lnStyleLst>
+        <a:ln w="6350" cap="flat" cmpd="sng" algn="ctr">
+          <a:solidFill>
+            <a:schemeClr val="phClr"/>
+          </a:solidFill>
+          <a:prstDash val="solid"/>
+          <a:miter lim="800000"/>
+        </a:ln>
+        <a:ln w="12700" cap="flat" cmpd="sng" algn="ctr">
+          <a:solidFill>
+            <a:schemeClr val="phClr"/>
+          </a:solidFill>
+          <a:prstDash val="solid"/>
+          <a:miter lim="800000"/>
+        </a:ln>
+        <a:ln w="19050" cap="flat" cmpd="sng" algn="ctr">
+          <a:solidFill>
+            <a:schemeClr val="phClr"/>
+          </a:solidFill>
+          <a:prstDash val="solid"/>
+          <a:miter lim="800000"/>
+        </a:ln>
+      </a:lnStyleLst>
+      <a:effectStyleLst>
+        <a:effectStyle>
+          <a:effectLst/>
+        </a:effectStyle>
+        <a:effectStyle>
+          <a:effectLst/>
+        </a:effectStyle>
+        <a:effectStyle>
+          <a:effectLst>
+            <a:outerShdw blurRad="57150" dist="19050" dir="5400000" algn="ctr" rotWithShape="0">
+              <a:srgbClr val="000000">
+                <a:alpha val="63000"/>
+              </a:srgbClr>
+            </a:outerShdw>
+          </a:effectLst>
+        </a:effectStyle>
+      </a:effectStyleLst>
+      <a:bgFillStyleLst>
+        <a:solidFill>
+          <a:schemeClr val="phClr"/>
+        </a:solidFill>
+        <a:solidFill>
+          <a:schemeClr val="phClr">
+            <a:tint val="95000"/>
+            <a:satMod val="170000"/>
+          </a:schemeClr>
+        </a:solidFill>
+        <a:gradFill rotWithShape="1">
+          <a:gsLst>
+            <a:gs pos="0">
+              <a:schemeClr val="phClr">
+                <a:tint val="93000"/>
+                <a:satMod val="150000"/>
+                <a:shade val="98000"/>
+                <a:lumMod val="102000"/>
+              </a:schemeClr>
+            </a:gs>
+            <a:gs pos="50000">
+              <a:schemeClr val="phClr">
+                <a:tint val="98000"/>
+                <a:satMod val="130000"/>
+                <a:shade val="90000"/>
+                <a:lumMod val="103000"/>
+              </a:schemeClr>
+            </a:gs>
+            <a:gs pos="100000">
+              <a:schemeClr val="phClr">
+                <a:shade val="63000"/>
+                <a:satMod val="120000"/>
+              </a:schemeClr>
+            </a:gs>
+          </a:gsLst>
+          <a:lin ang="5400000" scaled="0"/>
+        </a:gradFill>
+      </a:bgFillStyleLst>
+    </a:fmtScheme>
+  </a:themeElements>
+  <a:objectDefaults/>
+  <a:extraClrSchemeLst/>
+  <a:extLst>
+    <a:ext uri="{05A4C25C-085E-4340-85A3-A5531E510DB2}">
+      <thm15:themeFamily xmlns:thm15="http://schemas.microsoft.com/office/thememl/2012/main" name="Office Theme" id="{62F939B6-93AF-4DB8-9C6B-D6C7DFDC589F}" vid="{4A3C46E8-61CC-4603-A589-7422A47A8E4A}"/>
+    </a:ext>
+  </a:extLst>
+</a:theme>
 </file>